--- a/outputs/Skin_Cancer_Detection_XAI_Presentation.pptx
+++ b/outputs/Skin_Cancer_Detection_XAI_Presentation.pptx
@@ -2519,7 +2519,7 @@
               </a:defRPr>
             </a:pPr>
             <a:r>
-              <a:rPr sz="2100" b="1">
+              <a:rPr sz="2100" b="1" dirty="0">
                 <a:solidFill>
                   <a:srgbClr val="FFFFFF"/>
                 </a:solidFill>
@@ -3103,12 +3103,12 @@
               </a:defRPr>
             </a:pPr>
             <a:r>
-              <a:rPr sz="1200" b="1">
+              <a:rPr sz="1200" b="1" dirty="0">
                 <a:solidFill>
                   <a:srgbClr val="FF6B35"/>
                 </a:solidFill>
               </a:rPr>
-              <a:t>SKIN CANCER DETECTION + XAI</a:t>
+              <a:t>SKIN CANCER DETECTION </a:t>
             </a:r>
           </a:p>
         </p:txBody>
@@ -3626,13 +3626,18 @@
               </a:defRPr>
             </a:pPr>
             <a:r>
-              <a:rPr sz="1050" b="0">
+              <a:rPr lang="en-IN" sz="1050" dirty="0">
                 <a:solidFill>
                   <a:srgbClr val="555555"/>
                 </a:solidFill>
               </a:rPr>
-              <a:t>HAM10000 Deep Learning Project | 11</a:t>
-            </a:r>
+              <a:t>O6</a:t>
+            </a:r>
+            <a:endParaRPr sz="1050" b="0" dirty="0">
+              <a:solidFill>
+                <a:srgbClr val="555555"/>
+              </a:solidFill>
+            </a:endParaRPr>
           </a:p>
         </p:txBody>
       </p:sp>
@@ -3706,12 +3711,12 @@
               </a:defRPr>
             </a:pPr>
             <a:r>
-              <a:rPr sz="1200" b="1">
+              <a:rPr sz="1200" b="1" dirty="0">
                 <a:solidFill>
                   <a:srgbClr val="FF6B35"/>
                 </a:solidFill>
               </a:rPr>
-              <a:t>SKIN CANCER DETECTION + XAI</a:t>
+              <a:t>SKIN CANCER DETECTION </a:t>
             </a:r>
           </a:p>
         </p:txBody>
@@ -4228,13 +4233,18 @@
               </a:defRPr>
             </a:pPr>
             <a:r>
-              <a:rPr sz="1050" b="0">
+              <a:rPr lang="en-IN" sz="1050" b="0" dirty="0">
                 <a:solidFill>
                   <a:srgbClr val="555555"/>
                 </a:solidFill>
               </a:rPr>
-              <a:t>HAM10000 Deep Learning Project | 12</a:t>
-            </a:r>
+              <a:t>07</a:t>
+            </a:r>
+            <a:endParaRPr sz="1050" b="0" dirty="0">
+              <a:solidFill>
+                <a:srgbClr val="555555"/>
+              </a:solidFill>
+            </a:endParaRPr>
           </a:p>
         </p:txBody>
       </p:sp>
@@ -4520,12 +4530,12 @@
               </a:defRPr>
             </a:pPr>
             <a:r>
-              <a:rPr sz="1200" b="1">
+              <a:rPr sz="1200" b="1" dirty="0">
                 <a:solidFill>
                   <a:srgbClr val="FF6B35"/>
                 </a:solidFill>
               </a:rPr>
-              <a:t>SKIN CANCER DETECTION + XAI</a:t>
+              <a:t>SKIN CANCER DETECTION </a:t>
             </a:r>
           </a:p>
         </p:txBody>
@@ -5076,12 +5086,12 @@
               </a:defRPr>
             </a:pPr>
             <a:r>
-              <a:rPr sz="1200" b="1">
+              <a:rPr sz="1200" b="1" dirty="0">
                 <a:solidFill>
                   <a:srgbClr val="FF6B35"/>
                 </a:solidFill>
               </a:rPr>
-              <a:t>SKIN CANCER DETECTION + XAI</a:t>
+              <a:t>SKIN CANCER DETECTION</a:t>
             </a:r>
           </a:p>
         </p:txBody>
@@ -6075,12 +6085,12 @@
               </a:defRPr>
             </a:pPr>
             <a:r>
-              <a:rPr sz="1200" b="1">
+              <a:rPr sz="1200" b="1" dirty="0">
                 <a:solidFill>
                   <a:srgbClr val="FF6B35"/>
                 </a:solidFill>
               </a:rPr>
-              <a:t>SKIN CANCER DETECTION + XAI</a:t>
+              <a:t>SKIN CANCER DETECTION </a:t>
             </a:r>
           </a:p>
         </p:txBody>
@@ -7305,12 +7315,12 @@
               </a:defRPr>
             </a:pPr>
             <a:r>
-              <a:rPr sz="1050" b="0">
+              <a:rPr sz="1050" b="0" dirty="0">
                 <a:solidFill>
                   <a:srgbClr val="555555"/>
                 </a:solidFill>
               </a:rPr>
-              <a:t>HAM10000 Deep Learning Project | 04</a:t>
+              <a:t>04</a:t>
             </a:r>
           </a:p>
         </p:txBody>
@@ -7778,12 +7788,12 @@
               </a:defRPr>
             </a:pPr>
             <a:r>
-              <a:rPr sz="1200" b="1">
+              <a:rPr sz="1200" b="1" dirty="0">
                 <a:solidFill>
                   <a:srgbClr val="FF6B35"/>
                 </a:solidFill>
               </a:rPr>
-              <a:t>SKIN CANCER DETECTION + XAI</a:t>
+              <a:t>SKIN CANCER DETECTION </a:t>
             </a:r>
           </a:p>
         </p:txBody>
@@ -8351,13 +8361,26 @@
               </a:defRPr>
             </a:pPr>
             <a:r>
-              <a:rPr sz="1050" b="0">
+              <a:rPr sz="1050" b="0" dirty="0">
                 <a:solidFill>
                   <a:srgbClr val="555555"/>
                 </a:solidFill>
               </a:rPr>
-              <a:t>HAM10000 Deep Learning Project | 06</a:t>
-            </a:r>
+              <a:t>0</a:t>
+            </a:r>
+            <a:r>
+              <a:rPr lang="en-IN" sz="1050" b="0" dirty="0">
+                <a:solidFill>
+                  <a:srgbClr val="555555"/>
+                </a:solidFill>
+              </a:rPr>
+              <a:t>5</a:t>
+            </a:r>
+            <a:endParaRPr sz="1050" b="0" dirty="0">
+              <a:solidFill>
+                <a:srgbClr val="555555"/>
+              </a:solidFill>
+            </a:endParaRPr>
           </a:p>
         </p:txBody>
       </p:sp>
